--- a/lectures/Lecture 1.3 - How Git Actually Works.pptx
+++ b/lectures/Lecture 1.3 - How Git Actually Works.pptx
@@ -1231,7 +1231,7 @@
             </a:pPr>
             <a:r>
               <a:rPr lang="en-US"/>
-              <a:t>If students think of history as a timeline, they'll be confused by rebase, cherry-pick, and detached HEAD. The DAG is the real mental model.</a:t>
+              <a:t>Anyone still holding onto history-as-a-timeline is gonna get confused the moment we hit rebase or cherry-pick or detached HEAD, so the DAG has to replace the timeline in their head before we get anywhere near those.</a:t>
             </a:r>
             <a:endParaRPr/>
           </a:p>
@@ -1382,7 +1382,7 @@
             </a:pPr>
             <a:r>
               <a:rPr lang="en-US"/>
-              <a:t>If students think of history as a timeline, they'll be confused by rebase, cherry-pick, and detached HEAD. The DAG is the real mental model.</a:t>
+              <a:t>Anyone still holding onto history-as-a-timeline is gonna get confused the moment we hit rebase or cherry-pick or detached HEAD, so the DAG has to replace the timeline in their head before we get anywhere near those.</a:t>
             </a:r>
             <a:endParaRPr/>
           </a:p>
@@ -1533,7 +1533,7 @@
             </a:pPr>
             <a:r>
               <a:rPr lang="en-US"/>
-              <a:t>If students think of history as a timeline, they'll be confused by rebase, cherry-pick, and detached HEAD. The DAG is the real mental model.</a:t>
+              <a:t>Anyone still holding onto history-as-a-timeline is gonna get confused the moment we hit rebase or cherry-pick or detached HEAD, so the DAG has to replace the timeline in their head before we get anywhere near those.</a:t>
             </a:r>
             <a:endParaRPr/>
           </a:p>
@@ -1985,7 +1985,7 @@
             </a:pPr>
             <a:r>
               <a:rPr lang="en-US"/>
-              <a:t>If students think of history as a timeline, they'll be confused by rebase, cherry-pick, and detached HEAD. The DAG is the real mental model.</a:t>
+              <a:t>Anyone still holding onto history-as-a-timeline is gonna get confused the moment we hit rebase or cherry-pick or detached HEAD, so the DAG has to replace the timeline in their head before we get anywhere near those.</a:t>
             </a:r>
             <a:endParaRPr/>
           </a:p>
@@ -2891,7 +2891,7 @@
             </a:pPr>
             <a:r>
               <a:rPr lang="en-US"/>
-              <a:t>Fast-forward is the easy case. Three-way merge is where students get confused. Emphasize: merge commit = commit with 2 parents.</a:t>
+              <a:t>Fast-forward is the easy case and nobody struggles with it. The three-way merge is where students lose the thread, so keep coming back to the one fact that a merge commit is just a commit with two parents.</a:t>
             </a:r>
             <a:endParaRPr/>
           </a:p>
@@ -3042,7 +3042,7 @@
             </a:pPr>
             <a:r>
               <a:rPr lang="en-US"/>
-              <a:t>The key insight: rebase creates COPIES of your commits, not moves. F1 and F1' have the same diff but different hashes and parents.</a:t>
+              <a:t>Rebase creates COPIES of your commits - it doesn't move anything, despite what the word sounds like - and F1 and F1' end up with the same diff but different hashes and different parents.</a:t>
             </a:r>
             <a:endParaRPr/>
           </a:p>
@@ -3193,7 +3193,7 @@
             </a:pPr>
             <a:r>
               <a:rPr lang="en-US"/>
-              <a:t>Left: merge creates merge commit. Right: rebase gives linear history. Note F1' has a different hash than F1.</a:t>
+              <a:t>Left side is the merge, so you get the merge commit; right side is the rebase, so the history comes out linear. Point at F1' and its different hash while you're over there.</a:t>
             </a:r>
             <a:endParaRPr/>
           </a:p>
@@ -3344,7 +3344,7 @@
             </a:pPr>
             <a:r>
               <a:rPr lang="en-US"/>
-              <a:t>This is the one rule that prevents rebase disasters. The GitHub 'squash and merge' button is safe because it creates one new commit on main, not rewriting shared history.</a:t>
+              <a:t>This is the one rule that keeps rebase from turning into a disaster. And the GitHub 'squash and merge' button is safe because all it does is put one new commit on main - it never goes back and rewrites history other people already have.</a:t>
             </a:r>
             <a:endParaRPr/>
           </a:p>
@@ -3646,7 +3646,7 @@
             </a:pPr>
             <a:r>
               <a:rPr lang="en-US"/>
-              <a:t>Fast-forward = no divergence, so no conflicting edits. Rebase = replaying diffs one at a time onto a base that may have changed the same lines. Three-way merge can also conflict.</a:t>
+              <a:t>A fast-forward can't conflict because nothing diverged in the first place. A rebase replays your diffs one at a time onto a base that may well have touched the same lines, which is why it can conflict repeatedly...and a three-way merge can conflict too, just all at once.</a:t>
             </a:r>
             <a:endParaRPr/>
           </a:p>
@@ -4552,7 +4552,7 @@
             </a:pPr>
             <a:r>
               <a:rPr lang="en-US"/>
-              <a:t>Once they know about rebase and squash, they need to know: you can almost always undo mistakes.</a:t>
+              <a:t>Now that they've seen rebase and squash, they need the other half of it - you can almost always undo this stuff.</a:t>
             </a:r>
             <a:endParaRPr/>
           </a:p>
@@ -5557,7 +5557,7 @@
             </a:pPr>
             <a:r>
               <a:rPr lang="en-US"/>
-              <a:t>If they internalize the DAG + reflog, they'll never be scared of Git again. Next lecture: file I/O and databases.</a:t>
+              <a:t>If the DAG and the reflog stick, git stops being scary for good. Next time it's file I/O and databases.</a:t>
             </a:r>
             <a:endParaRPr/>
           </a:p>
@@ -5858,7 +5858,7 @@
             </a:pPr>
             <a:r>
               <a:rPr lang="en-US"/>
-              <a:t>Key insight: Git is a content-addressed filesystem with a VCS built on top. Everything else (branches, tags, HEAD) is just pointers.</a:t>
+              <a:t>Git is a content-addressed filesystem with a version control system built on top of it, and once that lands, everything else - branches, tags, HEAD - is just pointers into it.</a:t>
             </a:r>
             <a:endParaRPr/>
           </a:p>
@@ -6259,7 +6259,7 @@
             </a:pPr>
             <a:r>
               <a:rPr lang="en-US"/>
-              <a:t>Key aha: a commit is literally just text. A tree is a directory listing. A blob is raw file contents. That's the entire data model. git cat-file -t shows the type, -p pretty-prints, -s shows size.</a:t>
+              <a:t>The aha here is that a commit is literally just text, a tree is a directory listing, a blob is the raw file contents, and that's the whole data model with nothing hiding underneath it. git cat-file -t gives you the type, -p pretty-prints, -s shows size.</a:t>
             </a:r>
             <a:endParaRPr/>
           </a:p>

--- a/lectures/Lecture 1.3 - How Git Actually Works.pptx
+++ b/lectures/Lecture 1.3 - How Git Actually Works.pptx
@@ -819,20 +819,9 @@
           </a:bodyPr>
           <a:lstStyle/>
           <a:p>
-            <a:pPr indent="0" lvl="0" marL="0" rtl="0" algn="l">
-              <a:spcBef>
-                <a:spcPts val="0"/>
-              </a:spcBef>
-              <a:spcAft>
-                <a:spcPts val="0"/>
-              </a:spcAft>
-              <a:buNone/>
-            </a:pPr>
-            <a:r>
-              <a:rPr lang="en-US"/>
-              <a:t>Leveled up from 'intro to git'. Students already commit, branch, PR. Today: the object model, DAG, rebase mechanics, workflows, reflog.</a:t>
-            </a:r>
-            <a:endParaRPr/>
+            <a:r>
+              <a:t>Assumes they already commit, branch, PR; skip basics.</a:t>
+            </a:r>
           </a:p>
         </p:txBody>
       </p:sp>
@@ -1068,22 +1057,7 @@
             <a:noAutofit/>
           </a:bodyPr>
           <a:lstStyle/>
-          <a:p>
-            <a:pPr indent="0" lvl="0" marL="0" rtl="0" algn="l">
-              <a:spcBef>
-                <a:spcPts val="0"/>
-              </a:spcBef>
-              <a:spcAft>
-                <a:spcPts val="0"/>
-              </a:spcAft>
-              <a:buNone/>
-            </a:pPr>
-            <a:r>
-              <a:rPr lang="en-US"/>
-              <a:t>Now 'git checkout -b' makes sense as a shortcut: create ref file + update HEAD symref.</a:t>
-            </a:r>
-            <a:endParaRPr/>
-          </a:p>
+          <a:p/>
         </p:txBody>
       </p:sp>
       <p:sp>
@@ -1219,22 +1193,7 @@
             <a:noAutofit/>
           </a:bodyPr>
           <a:lstStyle/>
-          <a:p>
-            <a:pPr indent="0" lvl="0" marL="0" rtl="0" algn="l">
-              <a:spcBef>
-                <a:spcPts val="0"/>
-              </a:spcBef>
-              <a:spcAft>
-                <a:spcPts val="0"/>
-              </a:spcAft>
-              <a:buNone/>
-            </a:pPr>
-            <a:r>
-              <a:rPr lang="en-US"/>
-              <a:t>Anyone still holding onto history-as-a-timeline is gonna get confused the moment we hit rebase or cherry-pick or detached HEAD, so the DAG has to replace the timeline in their head before we get anywhere near those.</a:t>
-            </a:r>
-            <a:endParaRPr/>
-          </a:p>
+          <a:p/>
         </p:txBody>
       </p:sp>
       <p:sp>
@@ -1370,22 +1329,7 @@
             <a:noAutofit/>
           </a:bodyPr>
           <a:lstStyle/>
-          <a:p>
-            <a:pPr indent="0" lvl="0" marL="0" rtl="0" algn="l">
-              <a:spcBef>
-                <a:spcPts val="0"/>
-              </a:spcBef>
-              <a:spcAft>
-                <a:spcPts val="0"/>
-              </a:spcAft>
-              <a:buNone/>
-            </a:pPr>
-            <a:r>
-              <a:rPr lang="en-US"/>
-              <a:t>Anyone still holding onto history-as-a-timeline is gonna get confused the moment we hit rebase or cherry-pick or detached HEAD, so the DAG has to replace the timeline in their head before we get anywhere near those.</a:t>
-            </a:r>
-            <a:endParaRPr/>
-          </a:p>
+          <a:p/>
         </p:txBody>
       </p:sp>
       <p:sp>
@@ -1521,22 +1465,7 @@
             <a:noAutofit/>
           </a:bodyPr>
           <a:lstStyle/>
-          <a:p>
-            <a:pPr indent="0" lvl="0" marL="0" rtl="0" algn="l">
-              <a:spcBef>
-                <a:spcPts val="0"/>
-              </a:spcBef>
-              <a:spcAft>
-                <a:spcPts val="0"/>
-              </a:spcAft>
-              <a:buNone/>
-            </a:pPr>
-            <a:r>
-              <a:rPr lang="en-US"/>
-              <a:t>Anyone still holding onto history-as-a-timeline is gonna get confused the moment we hit rebase or cherry-pick or detached HEAD, so the DAG has to replace the timeline in their head before we get anywhere near those.</a:t>
-            </a:r>
-            <a:endParaRPr/>
-          </a:p>
+          <a:p/>
         </p:txBody>
       </p:sp>
       <p:sp>
@@ -1822,22 +1751,7 @@
             <a:noAutofit/>
           </a:bodyPr>
           <a:lstStyle/>
-          <a:p>
-            <a:pPr indent="0" lvl="0" marL="0" rtl="0" algn="l">
-              <a:spcBef>
-                <a:spcPts val="0"/>
-              </a:spcBef>
-              <a:spcAft>
-                <a:spcPts val="0"/>
-              </a:spcAft>
-              <a:buNone/>
-            </a:pPr>
-            <a:r>
-              <a:rPr lang="en-US"/>
-              <a:t>From individual objects to the big picture: history as a DAG.</a:t>
-            </a:r>
-            <a:endParaRPr/>
-          </a:p>
+          <a:p/>
         </p:txBody>
       </p:sp>
       <p:sp>
@@ -1974,20 +1888,9 @@
           </a:bodyPr>
           <a:lstStyle/>
           <a:p>
-            <a:pPr indent="0" lvl="0" marL="0" rtl="0" algn="l">
-              <a:spcBef>
-                <a:spcPts val="0"/>
-              </a:spcBef>
-              <a:spcAft>
-                <a:spcPts val="0"/>
-              </a:spcAft>
-              <a:buNone/>
-            </a:pPr>
-            <a:r>
-              <a:rPr lang="en-US"/>
-              <a:t>Anyone still holding onto history-as-a-timeline is gonna get confused the moment we hit rebase or cherry-pick or detached HEAD, so the DAG has to replace the timeline in their head before we get anywhere near those.</a:t>
-            </a:r>
-            <a:endParaRPr/>
+            <a:r>
+              <a:t>Replace the timeline model with the DAG here; rebase and detached HEAD depend on it.</a:t>
+            </a:r>
           </a:p>
         </p:txBody>
       </p:sp>
@@ -2125,20 +2028,9 @@
           </a:bodyPr>
           <a:lstStyle/>
           <a:p>
-            <a:pPr indent="0" lvl="0" marL="0" rtl="0" algn="l">
-              <a:spcBef>
-                <a:spcPts val="0"/>
-              </a:spcBef>
-              <a:spcAft>
-                <a:spcPts val="0"/>
-              </a:spcAft>
-              <a:buNone/>
-            </a:pPr>
-            <a:r>
-              <a:rPr lang="en-US"/>
-              <a:t>Show how branches are just labels pointing into the graph. Merge commit M has TWO parents.</a:t>
-            </a:r>
-            <a:endParaRPr/>
+            <a:r>
+              <a:t>Walk through: branches are labels into the graph; M gets two parents.</a:t>
+            </a:r>
           </a:p>
         </p:txBody>
       </p:sp>
@@ -2276,20 +2168,9 @@
           </a:bodyPr>
           <a:lstStyle/>
           <a:p>
-            <a:pPr indent="0" lvl="0" marL="0" rtl="0" algn="l">
-              <a:spcBef>
-                <a:spcPts val="0"/>
-              </a:spcBef>
-              <a:spcAft>
-                <a:spcPts val="0"/>
-              </a:spcAft>
-              <a:buNone/>
-            </a:pPr>
-            <a:r>
-              <a:rPr lang="en-US"/>
-              <a:t>Show how branches are just labels pointing into the graph. Merge commit M has TWO parents.</a:t>
-            </a:r>
-            <a:endParaRPr/>
+            <a:r>
+              <a:t>Walk through: branches are labels into the graph; M gets two parents.</a:t>
+            </a:r>
           </a:p>
         </p:txBody>
       </p:sp>
@@ -2427,20 +2308,9 @@
           </a:bodyPr>
           <a:lstStyle/>
           <a:p>
-            <a:pPr indent="0" lvl="0" marL="0" rtl="0" algn="l">
-              <a:spcBef>
-                <a:spcPts val="0"/>
-              </a:spcBef>
-              <a:spcAft>
-                <a:spcPts val="0"/>
-              </a:spcAft>
-              <a:buNone/>
-            </a:pPr>
-            <a:r>
-              <a:rPr lang="en-US"/>
-              <a:t>Most students will say 'it saves a snapshot' or 'it makes a checkpoint.' What IS a snapshot? Where is it stored? What's the hash?</a:t>
-            </a:r>
-            <a:endParaRPr/>
+            <a:r>
+              <a:t>Expect 'saves a snapshot'; ask: what is a snapshot, where stored, what's the hash?</a:t>
+            </a:r>
           </a:p>
         </p:txBody>
       </p:sp>
@@ -2578,20 +2448,9 @@
           </a:bodyPr>
           <a:lstStyle/>
           <a:p>
-            <a:pPr indent="0" lvl="0" marL="0" rtl="0" algn="l">
-              <a:spcBef>
-                <a:spcPts val="0"/>
-              </a:spcBef>
-              <a:spcAft>
-                <a:spcPts val="0"/>
-              </a:spcAft>
-              <a:buNone/>
-            </a:pPr>
-            <a:r>
-              <a:rPr lang="en-US"/>
-              <a:t>Show how branches are just labels pointing into the graph. Merge commit M has TWO parents.</a:t>
-            </a:r>
-            <a:endParaRPr/>
+            <a:r>
+              <a:t>Walk through: branches are labels into the graph; M gets two parents.</a:t>
+            </a:r>
           </a:p>
         </p:txBody>
       </p:sp>
@@ -2728,22 +2587,7 @@
             <a:noAutofit/>
           </a:bodyPr>
           <a:lstStyle/>
-          <a:p>
-            <a:pPr indent="0" lvl="0" marL="0" rtl="0" algn="l">
-              <a:spcBef>
-                <a:spcPts val="0"/>
-              </a:spcBef>
-              <a:spcAft>
-                <a:spcPts val="0"/>
-              </a:spcAft>
-              <a:buNone/>
-            </a:pPr>
-            <a:r>
-              <a:rPr lang="en-US"/>
-              <a:t>They've done both. Now they understand what each does to the graph.</a:t>
-            </a:r>
-            <a:endParaRPr/>
-          </a:p>
+          <a:p/>
         </p:txBody>
       </p:sp>
       <p:sp>
@@ -2880,20 +2724,9 @@
           </a:bodyPr>
           <a:lstStyle/>
           <a:p>
-            <a:pPr indent="0" lvl="0" marL="0" rtl="0" algn="l">
-              <a:spcBef>
-                <a:spcPts val="0"/>
-              </a:spcBef>
-              <a:spcAft>
-                <a:spcPts val="0"/>
-              </a:spcAft>
-              <a:buNone/>
-            </a:pPr>
-            <a:r>
-              <a:rPr lang="en-US"/>
-              <a:t>Fast-forward is the easy case and nobody struggles with it. The three-way merge is where students lose the thread, so keep coming back to the one fact that a merge commit is just a commit with two parents.</a:t>
-            </a:r>
-            <a:endParaRPr/>
+            <a:r>
+              <a:t>Go fast on fast-forward; spend the time on three-way.</a:t>
+            </a:r>
           </a:p>
         </p:txBody>
       </p:sp>
@@ -3031,20 +2864,9 @@
           </a:bodyPr>
           <a:lstStyle/>
           <a:p>
-            <a:pPr indent="0" lvl="0" marL="0" rtl="0" algn="l">
-              <a:spcBef>
-                <a:spcPts val="0"/>
-              </a:spcBef>
-              <a:spcAft>
-                <a:spcPts val="0"/>
-              </a:spcAft>
-              <a:buNone/>
-            </a:pPr>
-            <a:r>
-              <a:rPr lang="en-US"/>
-              <a:t>Rebase creates COPIES of your commits - it doesn't move anything, despite what the word sounds like - and F1 and F1' end up with the same diff but different hashes and different parents.</a:t>
-            </a:r>
-            <a:endParaRPr/>
+            <a:r>
+              <a:t>Rebase makes copies; F1 and F1' share a diff but differ in hash and parent.</a:t>
+            </a:r>
           </a:p>
         </p:txBody>
       </p:sp>
@@ -3182,20 +3004,9 @@
           </a:bodyPr>
           <a:lstStyle/>
           <a:p>
-            <a:pPr indent="0" lvl="0" marL="0" rtl="0" algn="l">
-              <a:spcBef>
-                <a:spcPts val="0"/>
-              </a:spcBef>
-              <a:spcAft>
-                <a:spcPts val="0"/>
-              </a:spcAft>
-              <a:buNone/>
-            </a:pPr>
-            <a:r>
-              <a:rPr lang="en-US"/>
-              <a:t>Left side is the merge, so you get the merge commit; right side is the rebase, so the history comes out linear. Point at F1' and its different hash while you're over there.</a:t>
-            </a:r>
-            <a:endParaRPr/>
+            <a:r>
+              <a:t>Point at F1' and its different hash.</a:t>
+            </a:r>
           </a:p>
         </p:txBody>
       </p:sp>
@@ -3333,20 +3144,9 @@
           </a:bodyPr>
           <a:lstStyle/>
           <a:p>
-            <a:pPr indent="0" lvl="0" marL="0" rtl="0" algn="l">
-              <a:spcBef>
-                <a:spcPts val="0"/>
-              </a:spcBef>
-              <a:spcAft>
-                <a:spcPts val="0"/>
-              </a:spcAft>
-              <a:buNone/>
-            </a:pPr>
-            <a:r>
-              <a:rPr lang="en-US"/>
-              <a:t>This is the one rule that keeps rebase from turning into a disaster. And the GitHub 'squash and merge' button is safe because all it does is put one new commit on main - it never goes back and rewrites history other people already have.</a:t>
-            </a:r>
-            <a:endParaRPr/>
+            <a:r>
+              <a:t>GitHub 'squash and merge' is safe: adds one commit to main, rewrites nothing.</a:t>
+            </a:r>
           </a:p>
         </p:txBody>
       </p:sp>
@@ -3484,20 +3284,9 @@
           </a:bodyPr>
           <a:lstStyle/>
           <a:p>
-            <a:pPr indent="0" lvl="0" marL="0" rtl="0" algn="l">
-              <a:spcBef>
-                <a:spcPts val="0"/>
-              </a:spcBef>
-              <a:spcAft>
-                <a:spcPts val="0"/>
-              </a:spcAft>
-              <a:buNone/>
-            </a:pPr>
-            <a:r>
-              <a:rPr lang="en-US"/>
-              <a:t>&lt;&lt;&lt;&lt; HEAD is current branch, === divides, &gt;&gt;&gt;&gt; is incoming. Same mechanics for merge conflicts and rebase conflicts. Rebase conflicts can happen at each replayed commit.</a:t>
-            </a:r>
-            <a:endParaRPr/>
+            <a:r>
+              <a:t>HEAD = current branch, &gt;&gt;&gt; = incoming. Rebase can conflict at each replayed commit.</a:t>
+            </a:r>
           </a:p>
         </p:txBody>
       </p:sp>
@@ -3635,20 +3424,9 @@
           </a:bodyPr>
           <a:lstStyle/>
           <a:p>
-            <a:pPr indent="0" lvl="0" marL="0" rtl="0" algn="l">
-              <a:spcBef>
-                <a:spcPts val="0"/>
-              </a:spcBef>
-              <a:spcAft>
-                <a:spcPts val="0"/>
-              </a:spcAft>
-              <a:buNone/>
-            </a:pPr>
-            <a:r>
-              <a:rPr lang="en-US"/>
-              <a:t>A fast-forward can't conflict because nothing diverged in the first place. A rebase replays your diffs one at a time onto a base that may well have touched the same lines, which is why it can conflict repeatedly...and a three-way merge can conflict too, just all at once.</a:t>
-            </a:r>
-            <a:endParaRPr/>
+            <a:r>
+              <a:t>Answer: fast-forward never diverged; rebase replays diffs one by one, so repeated conflicts.</a:t>
+            </a:r>
           </a:p>
         </p:txBody>
       </p:sp>
@@ -3786,20 +3564,9 @@
           </a:bodyPr>
           <a:lstStyle/>
           <a:p>
-            <a:pPr indent="0" lvl="0" marL="0" rtl="0" algn="l">
-              <a:spcBef>
-                <a:spcPts val="0"/>
-              </a:spcBef>
-              <a:spcAft>
-                <a:spcPts val="0"/>
-              </a:spcAft>
-              <a:buNone/>
-            </a:pPr>
-            <a:r>
-              <a:rPr lang="en-US"/>
-              <a:t>Most teams use feature branches + squash-and-merge now. Gitflow was popular 2010-2018 but has fallen out of favor.</a:t>
-            </a:r>
-            <a:endParaRPr/>
+            <a:r>
+              <a:t>Most teams: feature branch + squash. Gitflow peaked 2010-2018.</a:t>
+            </a:r>
           </a:p>
         </p:txBody>
       </p:sp>
@@ -3937,20 +3704,9 @@
           </a:bodyPr>
           <a:lstStyle/>
           <a:p>
-            <a:pPr indent="0" lvl="0" marL="0" rtl="0" algn="l">
-              <a:spcBef>
-                <a:spcPts val="0"/>
-              </a:spcBef>
-              <a:spcAft>
-                <a:spcPts val="0"/>
-              </a:spcAft>
-              <a:buNone/>
-            </a:pPr>
-            <a:r>
-              <a:rPr lang="en-US"/>
-              <a:t>Most teams use feature branches + squash-and-merge now. Gitflow was popular 2010-2018 but has fallen out of favor.</a:t>
-            </a:r>
-            <a:endParaRPr/>
+            <a:r>
+              <a:t>Most teams: feature branch + squash. Gitflow peaked 2010-2018.</a:t>
+            </a:r>
           </a:p>
         </p:txBody>
       </p:sp>
@@ -4088,20 +3844,9 @@
           </a:bodyPr>
           <a:lstStyle/>
           <a:p>
-            <a:pPr indent="0" lvl="0" marL="0" rtl="0" algn="l">
-              <a:spcBef>
-                <a:spcPts val="0"/>
-              </a:spcBef>
-              <a:spcAft>
-                <a:spcPts val="0"/>
-              </a:spcAft>
-              <a:buNone/>
-            </a:pPr>
-            <a:r>
-              <a:rPr lang="en-US"/>
-              <a:t>1-slide refresher. They know this but the object model builds on it.</a:t>
-            </a:r>
-            <a:endParaRPr/>
+            <a:r>
+              <a:t>1-slide refresher, move fast.</a:t>
+            </a:r>
           </a:p>
         </p:txBody>
       </p:sp>
@@ -4239,20 +3984,9 @@
           </a:bodyPr>
           <a:lstStyle/>
           <a:p>
-            <a:pPr indent="0" lvl="0" marL="0" rtl="0" algn="l">
-              <a:spcBef>
-                <a:spcPts val="0"/>
-              </a:spcBef>
-              <a:spcAft>
-                <a:spcPts val="0"/>
-              </a:spcAft>
-              <a:buNone/>
-            </a:pPr>
-            <a:r>
-              <a:rPr lang="en-US"/>
-              <a:t>Step 4 (squash) is interactive rebase, covered next. The GitHub 'Squash and merge' button does steps 4+6 together.</a:t>
-            </a:r>
-            <a:endParaRPr/>
+            <a:r>
+              <a:t>Step 4 (squash) = interactive rebase; GitHub button does 4 and 6 together.</a:t>
+            </a:r>
           </a:p>
         </p:txBody>
       </p:sp>
@@ -4389,22 +4123,7 @@
             <a:noAutofit/>
           </a:bodyPr>
           <a:lstStyle/>
-          <a:p>
-            <a:pPr indent="0" lvl="0" marL="0" rtl="0" algn="l">
-              <a:spcBef>
-                <a:spcPts val="0"/>
-              </a:spcBef>
-              <a:spcAft>
-                <a:spcPts val="0"/>
-              </a:spcAft>
-              <a:buNone/>
-            </a:pPr>
-            <a:r>
-              <a:rPr lang="en-US"/>
-              <a:t>Step 4 (squash) is interactive rebase, covered next. The GitHub 'Squash and merge' button does steps 4+6 together.</a:t>
-            </a:r>
-            <a:endParaRPr/>
-          </a:p>
+          <a:p/>
         </p:txBody>
       </p:sp>
       <p:sp>
@@ -4540,22 +4259,7 @@
             <a:noAutofit/>
           </a:bodyPr>
           <a:lstStyle/>
-          <a:p>
-            <a:pPr indent="0" lvl="0" marL="0" rtl="0" algn="l">
-              <a:spcBef>
-                <a:spcPts val="0"/>
-              </a:spcBef>
-              <a:spcAft>
-                <a:spcPts val="0"/>
-              </a:spcAft>
-              <a:buNone/>
-            </a:pPr>
-            <a:r>
-              <a:rPr lang="en-US"/>
-              <a:t>Now that they've seen rebase and squash, they need the other half of it - you can almost always undo this stuff.</a:t>
-            </a:r>
-            <a:endParaRPr/>
-          </a:p>
+          <a:p/>
         </p:txBody>
       </p:sp>
       <p:sp>
@@ -4692,20 +4396,9 @@
           </a:bodyPr>
           <a:lstStyle/>
           <a:p>
-            <a:pPr indent="0" lvl="0" marL="0" rtl="0" algn="l">
-              <a:spcBef>
-                <a:spcPts val="0"/>
-              </a:spcBef>
-              <a:spcAft>
-                <a:spcPts val="0"/>
-              </a:spcAft>
-              <a:buNone/>
-            </a:pPr>
-            <a:r>
-              <a:rPr lang="en-US"/>
-              <a:t>The reflog is the 'undo' button for Git. It's local only so it won't help if you force-pushed, but for local mistakes it's a lifesaver.</a:t>
-            </a:r>
-            <a:endParaRPr/>
+            <a:r>
+              <a:t>Local only: no help after a force-push.</a:t>
+            </a:r>
           </a:p>
         </p:txBody>
       </p:sp>
@@ -4843,20 +4536,9 @@
           </a:bodyPr>
           <a:lstStyle/>
           <a:p>
-            <a:pPr indent="0" lvl="0" marL="0" rtl="0" algn="l">
-              <a:spcBef>
-                <a:spcPts val="0"/>
-              </a:spcBef>
-              <a:spcAft>
-                <a:spcPts val="0"/>
-              </a:spcAft>
-              <a:buNone/>
-            </a:pPr>
-            <a:r>
-              <a:rPr lang="en-US"/>
-              <a:t>HEAD@{3} is where HEAD was 3 moves ago. This is why rebase isn't scary once you know the reflog. Pro tip: git reflog expire --expire=now --all + gc is the nuclear option that actually deletes things. Don't run that.</a:t>
-            </a:r>
-            <a:endParaRPr/>
+            <a:r>
+              <a:t>HEAD@{3} = three moves ago. `reflog expire --expire=now --all` + gc deletes for good; don't.</a:t>
+            </a:r>
           </a:p>
         </p:txBody>
       </p:sp>
@@ -5093,20 +4775,9 @@
           </a:bodyPr>
           <a:lstStyle/>
           <a:p>
-            <a:pPr indent="0" lvl="0" marL="0" rtl="0" algn="l">
-              <a:spcBef>
-                <a:spcPts val="0"/>
-              </a:spcBef>
-              <a:spcAft>
-                <a:spcPts val="0"/>
-              </a:spcAft>
-              <a:buNone/>
-            </a:pPr>
-            <a:r>
-              <a:rPr lang="en-US"/>
-              <a:t>Alternative: if the rebase is still in progress and going sideways, just git rebase --abort. The reflog is for after you already completed a bad rebase. Also: during rebase, ORIG_HEAD points to where you were before the rebase started.</a:t>
-            </a:r>
-            <a:endParaRPr/>
+            <a:r>
+              <a:t>Mid-rebase: `git rebase --abort`. ORIG_HEAD also points to the pre-rebase state.</a:t>
+            </a:r>
           </a:p>
         </p:txBody>
       </p:sp>
@@ -5243,22 +4914,7 @@
             <a:noAutofit/>
           </a:bodyPr>
           <a:lstStyle/>
-          <a:p>
-            <a:pPr indent="0" lvl="0" marL="0" rtl="0" algn="l">
-              <a:spcBef>
-                <a:spcPts val="0"/>
-              </a:spcBef>
-              <a:spcAft>
-                <a:spcPts val="0"/>
-              </a:spcAft>
-              <a:buNone/>
-            </a:pPr>
-            <a:r>
-              <a:rPr lang="en-US"/>
-              <a:t>These are the 'next level' commands beyond the basics. stash is especially useful when you need to switch branches but have uncommitted work.</a:t>
-            </a:r>
-            <a:endParaRPr/>
-          </a:p>
+          <a:p/>
         </p:txBody>
       </p:sp>
       <p:sp>
@@ -5394,22 +5050,7 @@
             <a:noAutofit/>
           </a:bodyPr>
           <a:lstStyle/>
-          <a:p>
-            <a:pPr indent="0" lvl="0" marL="0" rtl="0" algn="l">
-              <a:spcBef>
-                <a:spcPts val="0"/>
-              </a:spcBef>
-              <a:spcAft>
-                <a:spcPts val="0"/>
-              </a:spcAft>
-              <a:buNone/>
-            </a:pPr>
-            <a:r>
-              <a:rPr lang="en-US"/>
-              <a:t>These are the 'next level' commands beyond the basics. stash is especially useful when you need to switch branches but have uncommitted work.</a:t>
-            </a:r>
-            <a:endParaRPr/>
-          </a:p>
+          <a:p/>
         </p:txBody>
       </p:sp>
       <p:sp>
@@ -5546,20 +5187,9 @@
           </a:bodyPr>
           <a:lstStyle/>
           <a:p>
-            <a:pPr indent="0" lvl="0" marL="0" rtl="0" algn="l">
-              <a:spcBef>
-                <a:spcPts val="0"/>
-              </a:spcBef>
-              <a:spcAft>
-                <a:spcPts val="0"/>
-              </a:spcAft>
-              <a:buNone/>
-            </a:pPr>
-            <a:r>
-              <a:rPr lang="en-US"/>
-              <a:t>If the DAG and the reflog stick, git stops being scary for good. Next time it's file I/O and databases.</a:t>
-            </a:r>
-            <a:endParaRPr/>
+            <a:r>
+              <a:t>Next: file I/O and databases.</a:t>
+            </a:r>
           </a:p>
         </p:txBody>
       </p:sp>
@@ -5847,20 +5477,9 @@
           </a:bodyPr>
           <a:lstStyle/>
           <a:p>
-            <a:pPr indent="0" lvl="0" marL="0" rtl="0" algn="l">
-              <a:spcBef>
-                <a:spcPts val="0"/>
-              </a:spcBef>
-              <a:spcAft>
-                <a:spcPts val="0"/>
-              </a:spcAft>
-              <a:buNone/>
-            </a:pPr>
-            <a:r>
-              <a:rPr lang="en-US"/>
-              <a:t>Git is a content-addressed filesystem with a version control system built on top of it, and once that lands, everything else - branches, tags, HEAD - is just pointers into it.</a:t>
-            </a:r>
-            <a:endParaRPr/>
+            <a:r>
+              <a:t>Branches, tags, HEAD are all just pointers into the object store.</a:t>
+            </a:r>
           </a:p>
         </p:txBody>
       </p:sp>
@@ -5998,20 +5617,9 @@
           </a:bodyPr>
           <a:lstStyle/>
           <a:p>
-            <a:pPr indent="0" lvl="0" marL="0" rtl="0" algn="l">
-              <a:spcBef>
-                <a:spcPts val="0"/>
-              </a:spcBef>
-              <a:spcAft>
-                <a:spcPts val="0"/>
-              </a:spcAft>
-              <a:buNone/>
-            </a:pPr>
-            <a:r>
-              <a:rPr lang="en-US"/>
-              <a:t>Blob = file contents. Tree = directory listing. Commit = metadata + pointer to tree.</a:t>
-            </a:r>
-            <a:endParaRPr/>
+            <a:r>
+              <a:t>Blob = file contents, tree = directory listing, commit = metadata + tree pointer.</a:t>
+            </a:r>
           </a:p>
         </p:txBody>
       </p:sp>
@@ -6248,20 +5856,9 @@
           </a:bodyPr>
           <a:lstStyle/>
           <a:p>
-            <a:pPr indent="0" lvl="0" marL="0" rtl="0" algn="l">
-              <a:spcBef>
-                <a:spcPts val="0"/>
-              </a:spcBef>
-              <a:spcAft>
-                <a:spcPts val="0"/>
-              </a:spcAft>
-              <a:buNone/>
-            </a:pPr>
-            <a:r>
-              <a:rPr lang="en-US"/>
-              <a:t>The aha here is that a commit is literally just text, a tree is a directory listing, a blob is the raw file contents, and that's the whole data model with nothing hiding underneath it. git cat-file -t gives you the type, -p pretty-prints, -s shows size.</a:t>
-            </a:r>
-            <a:endParaRPr/>
+            <a:r>
+              <a:t>`cat-file -t` gives type, `-p` pretty-prints, `-s` shows size.</a:t>
+            </a:r>
           </a:p>
         </p:txBody>
       </p:sp>
